--- a/slides/02a_intro-to-mmm_WT26-27.pptx
+++ b/slides/02a_intro-to-mmm_WT26-27.pptx
@@ -2791,7 +2791,7 @@
           <a:lstStyle/>
           <a:p>
             <a:r>
-              <a:t>The chart splits German weekly sales in 2025 into a base and the part the model attributes to media. It comes from a deliberately simple regression (all five channels with the same carryover of 0.5, no saturation); in this first model media account for about 41 % of fitted sales. That number is illustrative only: Session 2 builds a proper model and you will see how much it moves. The dashed line is actual sales; the gap to the coloured area is what the model cannot explain.</a:t>
+              <a:t>The chart splits German weekly sales in 2025 into a base and the part the model attributes to media. It comes from a deliberately simple regression (all five channels with the same carryover of 0.5, no saturation); in this first model media account for about 41 % of fitted sales. That number is too high: Alpenglow raises its budgets before Christmas, when people buy chocolate anyway, so a naive model credits media with part of the seasonal demand (the endogeneity pitfall later in this deck). Session 2 builds a proper model and you will see the media share fall considerably. The dashed line is actual sales; the gap to the coloured area is what the model cannot explain.</a:t>
             </a:r>
           </a:p>
         </p:txBody>
@@ -11602,7 +11602,7 @@
                   <a:schemeClr val="tx2"/>
                 </a:solidFill>
               </a:rPr>
-              <a:t>less per euro</a:t>
+              <a:t>less per €</a:t>
             </a:r>
           </a:p>
         </p:txBody>
@@ -23613,7 +23613,7 @@
                   <a:srgbClr val="595959"/>
                 </a:solidFill>
               </a:rPr>
-              <a:t>Sources: Runge et al. 2024; Meridian and PyMC-Marketing documentation; Customer Needs and Solutions review 2026</a:t>
+              <a:t>Sources: Runge et al. 2024; Meridian and PyMC-Marketing documentation; open-source MMM review (2026)</a:t>
             </a:r>
           </a:p>
         </p:txBody>
@@ -25419,7 +25419,7 @@
         <p:spPr>
           <a:xfrm>
             <a:off x="457200" y="2423160"/>
-            <a:ext cx="2651760" cy="1737360"/>
+            <a:ext cx="2651760" cy="1417320"/>
           </a:xfrm>
           <a:prstGeom prst="rect">
             <a:avLst/>
@@ -25566,7 +25566,7 @@
         <p:spPr>
           <a:xfrm>
             <a:off x="621792" y="2560320"/>
-            <a:ext cx="2350008" cy="1463040"/>
+            <a:ext cx="2350008" cy="1143000"/>
           </a:xfrm>
           <a:prstGeom prst="rect">
             <a:avLst/>
@@ -25629,7 +25629,7 @@
         <p:spPr>
           <a:xfrm>
             <a:off x="3246120" y="2423160"/>
-            <a:ext cx="2651760" cy="1737360"/>
+            <a:ext cx="2651760" cy="1417320"/>
           </a:xfrm>
           <a:prstGeom prst="rect">
             <a:avLst/>
@@ -25776,7 +25776,7 @@
         <p:spPr>
           <a:xfrm>
             <a:off x="3410712" y="2560320"/>
-            <a:ext cx="2350008" cy="1463040"/>
+            <a:ext cx="2350008" cy="1143000"/>
           </a:xfrm>
           <a:prstGeom prst="rect">
             <a:avLst/>
@@ -25859,7 +25859,7 @@
         <p:spPr>
           <a:xfrm>
             <a:off x="6035040" y="2423160"/>
-            <a:ext cx="2651760" cy="1737360"/>
+            <a:ext cx="2651760" cy="1417320"/>
           </a:xfrm>
           <a:prstGeom prst="rect">
             <a:avLst/>
@@ -26006,7 +26006,7 @@
         <p:spPr>
           <a:xfrm>
             <a:off x="6199632" y="2560320"/>
-            <a:ext cx="2350008" cy="1463040"/>
+            <a:ext cx="2350008" cy="1143000"/>
           </a:xfrm>
           <a:prstGeom prst="rect">
             <a:avLst/>
@@ -26088,7 +26088,7 @@
         </p:nvSpPr>
         <p:spPr>
           <a:xfrm>
-            <a:off x="457200" y="4343400"/>
+            <a:off x="457200" y="4005072"/>
             <a:ext cx="8229600" cy="685800"/>
           </a:xfrm>
           <a:prstGeom prst="rect">
@@ -26138,7 +26138,7 @@
         </p:blipFill>
         <p:spPr>
           <a:xfrm>
-            <a:off x="658368" y="4503420"/>
+            <a:off x="658368" y="4165092"/>
             <a:ext cx="365760" cy="365760"/>
           </a:xfrm>
           <a:prstGeom prst="rect">
@@ -26154,7 +26154,7 @@
         </p:nvSpPr>
         <p:spPr>
           <a:xfrm>
-            <a:off x="1207008" y="4343400"/>
+            <a:off x="1207008" y="4005072"/>
             <a:ext cx="7315200" cy="685800"/>
           </a:xfrm>
           <a:prstGeom prst="rect">
@@ -26188,6 +26188,53 @@
                 </a:solidFill>
               </a:rPr>
               <a:t>the report renders from a fresh copy of your repository.</a:t>
+            </a:r>
+          </a:p>
+        </p:txBody>
+      </p:sp>
+      <p:sp>
+        <p:nvSpPr>
+          <p:cNvPr id="32" name="Case where"/>
+          <p:cNvSpPr txBox="1"/>
+          <p:nvPr/>
+        </p:nvSpPr>
+        <p:spPr>
+          <a:xfrm>
+            <a:off x="457200" y="4754880"/>
+            <a:ext cx="8229600" cy="292608"/>
+          </a:xfrm>
+          <a:prstGeom prst="rect">
+            <a:avLst/>
+          </a:prstGeom>
+          <a:noFill/>
+        </p:spPr>
+        <p:txBody>
+          <a:bodyPr wrap="square" lIns="0" rIns="0" tIns="0" bIns="0" anchor="ctr">
+            <a:noAutofit/>
+          </a:bodyPr>
+          <a:lstStyle/>
+          <a:p>
+            <a:pPr algn="l">
+              <a:spcAft>
+                <a:spcPts val="400"/>
+              </a:spcAft>
+            </a:pPr>
+            <a:r>
+              <a:rPr sz="1200" b="1" lang="en-GB">
+                <a:solidFill>
+                  <a:schemeClr val="tx2"/>
+                </a:solidFill>
+              </a:rPr>
+              <a:t>Brief, data and assessment criteria: </a:t>
+            </a:r>
+            <a:r>
+              <a:rPr sz="1200" b="0" lang="en-GB">
+                <a:solidFill>
+                  <a:schemeClr val="tx2"/>
+                </a:solidFill>
+                <a:latin typeface="Consolas"/>
+              </a:rPr>
+              <a:t>assignments/group-project/ and Canvas</a:t>
             </a:r>
           </a:p>
         </p:txBody>
@@ -32925,7 +32972,7 @@
                   <a:schemeClr val="bg1"/>
                 </a:solidFill>
               </a:rPr>
-              <a:t>First model: </a:t>
+              <a:t>Naive model: </a:t>
             </a:r>
             <a:r>
               <a:rPr sz="1200" b="0" lang="en-GB">
@@ -32933,7 +32980,7 @@
                   <a:schemeClr val="bg1"/>
                 </a:solidFill>
               </a:rPr>
-              <a:t>media ≈ 41 % of sales</a:t>
+              <a:t>media ≈ 41 %, too high</a:t>
             </a:r>
           </a:p>
         </p:txBody>
@@ -32971,7 +33018,7 @@
                   <a:srgbClr val="595959"/>
                 </a:solidFill>
               </a:rPr>
-              <a:t>Alpenglow Germany, 2025: a simple first regression for illustration, not the final model.</a:t>
+              <a:t>Alpenglow Germany, 2025, naive regression: budgets follow Christmas demand, so media get credit for seasonal sales (see the pitfalls slide).</a:t>
             </a:r>
           </a:p>
         </p:txBody>
